--- a/dist/초1/사회·역사/나와학교/초1_사회·역사_나와학교_01_학교의장소와사람들.pptx
+++ b/dist/초1/사회·역사/나와학교/초1_사회·역사_나와학교_01_학교의장소와사람들.pptx
@@ -121,20 +121,20 @@
   <p:extLst>
     <p:ext uri="{521415D9-36F7-43E2-AB2F-B90AF26B5E84}">
       <p14:sectionLst xmlns:p14="http://schemas.microsoft.com/office/powerpoint/2010/main">
-        <p14:section name="도입" id="{b638ed24-4ff1-cf55-9de1-e3eed9b1f365}">
+        <p14:section name="도입" id="{4bd1b57d-1a19-6d41-d744-4674fdef0f7f}">
           <p14:sldIdLst>
             <p14:sldId id="256"/>
             <p14:sldId id="257"/>
           </p14:sldIdLst>
         </p14:section>
-        <p14:section name="개념" id="{e131d249-4b68-b13b-b177-707891ebe54f}">
+        <p14:section name="개념" id="{d09f0022-306d-cb78-a0dd-013714c75859}">
           <p14:sldIdLst>
             <p14:sldId id="258"/>
             <p14:sldId id="259"/>
             <p14:sldId id="261"/>
           </p14:sldIdLst>
         </p14:section>
-        <p14:section name="연습" id="{4adc1a61-378a-f8fd-05cb-37b349d50abe}">
+        <p14:section name="연습" id="{cc8f60cc-330f-b4c1-f4be-2d696104cbf4}">
           <p14:sldIdLst>
             <p14:sldId id="260"/>
             <p14:sldId id="262"/>
@@ -142,13 +142,13 @@
             <p14:sldId id="264"/>
           </p14:sldIdLst>
         </p14:section>
-        <p14:section name="개념" id="{8ca9e712-5425-150a-2c41-9c2bc4265dd0}">
+        <p14:section name="개념" id="{65fccdec-e9fd-b555-8312-8e727ad9ede9}">
           <p14:sldIdLst/>
         </p14:section>
-        <p14:section name="연습" id="{12171a2c-6cc2-647a-7a2f-406af4f66043}">
+        <p14:section name="연습" id="{60c148fd-bcf8-9f6e-17c4-443add80b49b}">
           <p14:sldIdLst/>
         </p14:section>
-        <p14:section name="확인" id="{cee96ed1-4743-fe2b-c290-e7b0bcad262a}">
+        <p14:section name="확인" id="{cf042f93-91be-c32f-87f4-05b515e89cbc}">
           <p14:sldIdLst>
             <p14:sldId id="265"/>
             <p14:sldId id="266"/>
@@ -156,12 +156,12 @@
             <p14:sldId id="268"/>
           </p14:sldIdLst>
         </p14:section>
-        <p14:section name="정리" id="{001846c5-9b31-f89d-0cde-c1227ea7dbfd}">
+        <p14:section name="정리" id="{da9c360c-ed1e-857e-00d0-d0889b0b0b52}">
           <p14:sldIdLst>
             <p14:sldId id="269"/>
           </p14:sldIdLst>
         </p14:section>
-        <p14:section name="보충" id="{db1a2873-721a-17ef-9c5a-b3aacab94798}">
+        <p14:section name="보충" id="{a997f66b-b7fe-7698-dfdc-f0b72f5b1079}">
           <p14:sldIdLst>
             <p14:sldId id="270"/>
           </p14:sldIdLst>
